--- a/SQL/Intro To SQL Day 4.pptx
+++ b/SQL/Intro To SQL Day 4.pptx
@@ -285,7 +285,7 @@
           <a:p>
             <a:fld id="{046598D6-C04D-9446-A58F-36E01C46C344}" type="datetimeFigureOut">
               <a:rPr lang="en-US" smtClean="0"/>
-              <a:t>12/31/24</a:t>
+              <a:t>7/22/26</a:t>
             </a:fld>
             <a:endParaRPr lang="en-US"/>
           </a:p>
@@ -483,7 +483,7 @@
           <a:p>
             <a:fld id="{046598D6-C04D-9446-A58F-36E01C46C344}" type="datetimeFigureOut">
               <a:rPr lang="en-US" smtClean="0"/>
-              <a:t>12/31/24</a:t>
+              <a:t>7/22/26</a:t>
             </a:fld>
             <a:endParaRPr lang="en-US"/>
           </a:p>
@@ -691,7 +691,7 @@
           <a:p>
             <a:fld id="{046598D6-C04D-9446-A58F-36E01C46C344}" type="datetimeFigureOut">
               <a:rPr lang="en-US" smtClean="0"/>
-              <a:t>12/31/24</a:t>
+              <a:t>7/22/26</a:t>
             </a:fld>
             <a:endParaRPr lang="en-US"/>
           </a:p>
@@ -889,7 +889,7 @@
           <a:p>
             <a:fld id="{046598D6-C04D-9446-A58F-36E01C46C344}" type="datetimeFigureOut">
               <a:rPr lang="en-US" smtClean="0"/>
-              <a:t>12/31/24</a:t>
+              <a:t>7/22/26</a:t>
             </a:fld>
             <a:endParaRPr lang="en-US"/>
           </a:p>
@@ -1164,7 +1164,7 @@
           <a:p>
             <a:fld id="{046598D6-C04D-9446-A58F-36E01C46C344}" type="datetimeFigureOut">
               <a:rPr lang="en-US" smtClean="0"/>
-              <a:t>12/31/24</a:t>
+              <a:t>7/22/26</a:t>
             </a:fld>
             <a:endParaRPr lang="en-US"/>
           </a:p>
@@ -1429,7 +1429,7 @@
           <a:p>
             <a:fld id="{046598D6-C04D-9446-A58F-36E01C46C344}" type="datetimeFigureOut">
               <a:rPr lang="en-US" smtClean="0"/>
-              <a:t>12/31/24</a:t>
+              <a:t>7/22/26</a:t>
             </a:fld>
             <a:endParaRPr lang="en-US"/>
           </a:p>
@@ -1841,7 +1841,7 @@
           <a:p>
             <a:fld id="{046598D6-C04D-9446-A58F-36E01C46C344}" type="datetimeFigureOut">
               <a:rPr lang="en-US" smtClean="0"/>
-              <a:t>12/31/24</a:t>
+              <a:t>7/22/26</a:t>
             </a:fld>
             <a:endParaRPr lang="en-US"/>
           </a:p>
@@ -1982,7 +1982,7 @@
           <a:p>
             <a:fld id="{046598D6-C04D-9446-A58F-36E01C46C344}" type="datetimeFigureOut">
               <a:rPr lang="en-US" smtClean="0"/>
-              <a:t>12/31/24</a:t>
+              <a:t>7/22/26</a:t>
             </a:fld>
             <a:endParaRPr lang="en-US"/>
           </a:p>
@@ -2095,7 +2095,7 @@
           <a:p>
             <a:fld id="{046598D6-C04D-9446-A58F-36E01C46C344}" type="datetimeFigureOut">
               <a:rPr lang="en-US" smtClean="0"/>
-              <a:t>12/31/24</a:t>
+              <a:t>7/22/26</a:t>
             </a:fld>
             <a:endParaRPr lang="en-US"/>
           </a:p>
@@ -2406,7 +2406,7 @@
           <a:p>
             <a:fld id="{046598D6-C04D-9446-A58F-36E01C46C344}" type="datetimeFigureOut">
               <a:rPr lang="en-US" smtClean="0"/>
-              <a:t>12/31/24</a:t>
+              <a:t>7/22/26</a:t>
             </a:fld>
             <a:endParaRPr lang="en-US"/>
           </a:p>
@@ -2694,7 +2694,7 @@
           <a:p>
             <a:fld id="{046598D6-C04D-9446-A58F-36E01C46C344}" type="datetimeFigureOut">
               <a:rPr lang="en-US" smtClean="0"/>
-              <a:t>12/31/24</a:t>
+              <a:t>7/22/26</a:t>
             </a:fld>
             <a:endParaRPr lang="en-US"/>
           </a:p>
@@ -2935,7 +2935,7 @@
           <a:p>
             <a:fld id="{046598D6-C04D-9446-A58F-36E01C46C344}" type="datetimeFigureOut">
               <a:rPr lang="en-US" smtClean="0"/>
-              <a:t>12/31/24</a:t>
+              <a:t>7/22/26</a:t>
             </a:fld>
             <a:endParaRPr lang="en-US"/>
           </a:p>
@@ -3418,7 +3418,7 @@
           <a:p>
             <a:r>
               <a:rPr lang="en-US" dirty="0"/>
-              <a:t>January 2, 2025</a:t>
+              <a:t>July 22, 2026</a:t>
             </a:r>
           </a:p>
         </p:txBody>

--- a/SQL/Intro To SQL Day 4.pptx
+++ b/SQL/Intro To SQL Day 4.pptx
@@ -285,7 +285,7 @@
           <a:p>
             <a:fld id="{046598D6-C04D-9446-A58F-36E01C46C344}" type="datetimeFigureOut">
               <a:rPr lang="en-US" smtClean="0"/>
-              <a:t>7/22/26</a:t>
+              <a:t>8/21/26</a:t>
             </a:fld>
             <a:endParaRPr lang="en-US"/>
           </a:p>
@@ -483,7 +483,7 @@
           <a:p>
             <a:fld id="{046598D6-C04D-9446-A58F-36E01C46C344}" type="datetimeFigureOut">
               <a:rPr lang="en-US" smtClean="0"/>
-              <a:t>7/22/26</a:t>
+              <a:t>8/21/26</a:t>
             </a:fld>
             <a:endParaRPr lang="en-US"/>
           </a:p>
@@ -691,7 +691,7 @@
           <a:p>
             <a:fld id="{046598D6-C04D-9446-A58F-36E01C46C344}" type="datetimeFigureOut">
               <a:rPr lang="en-US" smtClean="0"/>
-              <a:t>7/22/26</a:t>
+              <a:t>8/21/26</a:t>
             </a:fld>
             <a:endParaRPr lang="en-US"/>
           </a:p>
@@ -889,7 +889,7 @@
           <a:p>
             <a:fld id="{046598D6-C04D-9446-A58F-36E01C46C344}" type="datetimeFigureOut">
               <a:rPr lang="en-US" smtClean="0"/>
-              <a:t>7/22/26</a:t>
+              <a:t>8/21/26</a:t>
             </a:fld>
             <a:endParaRPr lang="en-US"/>
           </a:p>
@@ -1164,7 +1164,7 @@
           <a:p>
             <a:fld id="{046598D6-C04D-9446-A58F-36E01C46C344}" type="datetimeFigureOut">
               <a:rPr lang="en-US" smtClean="0"/>
-              <a:t>7/22/26</a:t>
+              <a:t>8/21/26</a:t>
             </a:fld>
             <a:endParaRPr lang="en-US"/>
           </a:p>
@@ -1429,7 +1429,7 @@
           <a:p>
             <a:fld id="{046598D6-C04D-9446-A58F-36E01C46C344}" type="datetimeFigureOut">
               <a:rPr lang="en-US" smtClean="0"/>
-              <a:t>7/22/26</a:t>
+              <a:t>8/21/26</a:t>
             </a:fld>
             <a:endParaRPr lang="en-US"/>
           </a:p>
@@ -1841,7 +1841,7 @@
           <a:p>
             <a:fld id="{046598D6-C04D-9446-A58F-36E01C46C344}" type="datetimeFigureOut">
               <a:rPr lang="en-US" smtClean="0"/>
-              <a:t>7/22/26</a:t>
+              <a:t>8/21/26</a:t>
             </a:fld>
             <a:endParaRPr lang="en-US"/>
           </a:p>
@@ -1982,7 +1982,7 @@
           <a:p>
             <a:fld id="{046598D6-C04D-9446-A58F-36E01C46C344}" type="datetimeFigureOut">
               <a:rPr lang="en-US" smtClean="0"/>
-              <a:t>7/22/26</a:t>
+              <a:t>8/21/26</a:t>
             </a:fld>
             <a:endParaRPr lang="en-US"/>
           </a:p>
@@ -2095,7 +2095,7 @@
           <a:p>
             <a:fld id="{046598D6-C04D-9446-A58F-36E01C46C344}" type="datetimeFigureOut">
               <a:rPr lang="en-US" smtClean="0"/>
-              <a:t>7/22/26</a:t>
+              <a:t>8/21/26</a:t>
             </a:fld>
             <a:endParaRPr lang="en-US"/>
           </a:p>
@@ -2406,7 +2406,7 @@
           <a:p>
             <a:fld id="{046598D6-C04D-9446-A58F-36E01C46C344}" type="datetimeFigureOut">
               <a:rPr lang="en-US" smtClean="0"/>
-              <a:t>7/22/26</a:t>
+              <a:t>8/21/26</a:t>
             </a:fld>
             <a:endParaRPr lang="en-US"/>
           </a:p>
@@ -2694,7 +2694,7 @@
           <a:p>
             <a:fld id="{046598D6-C04D-9446-A58F-36E01C46C344}" type="datetimeFigureOut">
               <a:rPr lang="en-US" smtClean="0"/>
-              <a:t>7/22/26</a:t>
+              <a:t>8/21/26</a:t>
             </a:fld>
             <a:endParaRPr lang="en-US"/>
           </a:p>
@@ -2935,7 +2935,7 @@
           <a:p>
             <a:fld id="{046598D6-C04D-9446-A58F-36E01C46C344}" type="datetimeFigureOut">
               <a:rPr lang="en-US" smtClean="0"/>
-              <a:t>7/22/26</a:t>
+              <a:t>8/21/26</a:t>
             </a:fld>
             <a:endParaRPr lang="en-US"/>
           </a:p>
@@ -3384,8 +3384,13 @@
             </a:br>
             <a:r>
               <a:rPr lang="en-US" sz="4000" dirty="0"/>
-              <a:t>By Roxboro Solutions</a:t>
-            </a:r>
+              <a:t>By </a:t>
+            </a:r>
+            <a:r>
+              <a:rPr lang="en-US" sz="4000"/>
+              <a:t>AppJedi</a:t>
+            </a:r>
+            <a:endParaRPr lang="en-US" sz="4000" dirty="0"/>
           </a:p>
         </p:txBody>
       </p:sp>
@@ -3417,8 +3422,12 @@
           </a:p>
           <a:p>
             <a:r>
+              <a:rPr lang="en-US"/>
+              <a:t>August 21, </a:t>
+            </a:r>
+            <a:r>
               <a:rPr lang="en-US" dirty="0"/>
-              <a:t>July 22, 2026</a:t>
+              <a:t>2026</a:t>
             </a:r>
           </a:p>
         </p:txBody>
@@ -3497,7 +3506,12 @@
             <p:ph idx="1"/>
           </p:nvPr>
         </p:nvSpPr>
-        <p:spPr/>
+        <p:spPr>
+          <a:xfrm>
+            <a:off x="789432" y="1569593"/>
+            <a:ext cx="10515600" cy="4351338"/>
+          </a:xfrm>
+        </p:spPr>
         <p:txBody>
           <a:bodyPr/>
           <a:lstStyle/>
@@ -3760,7 +3774,7 @@
                 </a:highlight>
                 <a:latin typeface="Roboto Mono" pitchFamily="49" charset="0"/>
               </a:rPr>
-              <a:t>deptId</a:t>
+              <a:t>dept_id</a:t>
             </a:r>
             <a:r>
               <a:rPr lang="en-US" sz="2000" b="0" dirty="0">

--- a/SQL/Intro To SQL Day 4.pptx
+++ b/SQL/Intro To SQL Day 4.pptx
@@ -3422,12 +3422,8 @@
           </a:p>
           <a:p>
             <a:r>
-              <a:rPr lang="en-US"/>
-              <a:t>August 21, </a:t>
-            </a:r>
-            <a:r>
               <a:rPr lang="en-US" dirty="0"/>
-              <a:t>2026</a:t>
+              <a:t>August 21, 2026</a:t>
             </a:r>
           </a:p>
         </p:txBody>
@@ -6338,6 +6334,23 @@
                 <a:latin typeface="Roboto Mono" pitchFamily="49" charset="0"/>
               </a:rPr>
               <a:t>SELECT `type`,</a:t>
+            </a:r>
+          </a:p>
+          <a:p>
+            <a:pPr marL="0" indent="0">
+              <a:buNone/>
+            </a:pPr>
+            <a:r>
+              <a:rPr lang="en-US" sz="1400" dirty="0">
+                <a:solidFill>
+                  <a:srgbClr val="3367D6"/>
+                </a:solidFill>
+                <a:highlight>
+                  <a:srgbClr val="FFFFFF"/>
+                </a:highlight>
+                <a:latin typeface="Roboto Mono" pitchFamily="49" charset="0"/>
+              </a:rPr>
+              <a:t>	</a:t>
             </a:r>
             <a:r>
               <a:rPr lang="en-US" sz="1400" b="0" dirty="0" err="1">
